--- a/manual/Windy_操作マニュアル.pptx
+++ b/manual/Windy_操作マニュアル.pptx
@@ -14017,6 +14017,28 @@
                   <a:srgbClr val="1A1A2E"/>
                 </a:solidFill>
               </a:rPr>
+              <a:t>・計測時の原点は experiment_log に記録され、</a:t>
+            </a:r>
+          </a:p>
+          <a:p>
+            <a:pPr algn="l"/>
+            <a:r>
+              <a:rPr sz="1150" b="0" i="0">
+                <a:solidFill>
+                  <a:srgbClr val="1A1A2E"/>
+                </a:solidFill>
+              </a:rPr>
+              <a:t>  過去実験の再処理でも正しい推奨値になる。</a:t>
+            </a:r>
+          </a:p>
+          <a:p>
+            <a:pPr algn="l"/>
+            <a:r>
+              <a:rPr sz="1150" b="0" i="0">
+                <a:solidFill>
+                  <a:srgbClr val="1A1A2E"/>
+                </a:solidFill>
+              </a:rPr>
               <a:t>・y を選ぶと次回の実験から新しい原点で計測。</a:t>
             </a:r>
           </a:p>
@@ -14028,18 +14050,7 @@
                   <a:srgbClr val="1A1A2E"/>
                 </a:solidFill>
               </a:rPr>
-              <a:t>・n なら現状維持。既に推奨値と一致なら</a:t>
-            </a:r>
-          </a:p>
-          <a:p>
-            <a:pPr algn="l"/>
-            <a:r>
-              <a:rPr sz="1150" b="0" i="0">
-                <a:solidFill>
-                  <a:srgbClr val="1A1A2E"/>
-                </a:solidFill>
-              </a:rPr>
-              <a:t>  「修正不要」と表示してスキップ。</a:t>
+              <a:t>・n なら現状維持。既に一致ならスキップ。</a:t>
             </a:r>
           </a:p>
           <a:p>

--- a/manual/Windy_操作マニュアル.pptx
+++ b/manual/Windy_操作マニュアル.pptx
@@ -13837,7 +13837,7 @@
                   <a:srgbClr val="7FD97F"/>
                 </a:solidFill>
               </a:rPr>
-              <a:t>  この推奨値に修正しますか？ [y/N]:</a:t>
+              <a:t>  この推奨値に修正しますか？ [y/n]:</a:t>
             </a:r>
           </a:p>
         </p:txBody>
